--- a/.lessons/21 Fundamental CRUD/4 Creating Models And Migrations for CRUD/1.pptx
+++ b/.lessons/21 Fundamental CRUD/4 Creating Models And Migrations for CRUD/1.pptx
@@ -5,10 +5,11 @@
     <p:sldMasterId id="2147483648" r:id="rId1"/>
   </p:sldMasterIdLst>
   <p:sldIdLst>
-    <p:sldId id="401" r:id="rId2"/>
-    <p:sldId id="402" r:id="rId3"/>
-    <p:sldId id="403" r:id="rId4"/>
-    <p:sldId id="400" r:id="rId5"/>
+    <p:sldId id="404" r:id="rId2"/>
+    <p:sldId id="401" r:id="rId3"/>
+    <p:sldId id="402" r:id="rId4"/>
+    <p:sldId id="403" r:id="rId5"/>
+    <p:sldId id="400" r:id="rId6"/>
   </p:sldIdLst>
   <p:sldSz cx="12192000" cy="6858000"/>
   <p:notesSz cx="6858000" cy="9144000"/>
@@ -262,7 +263,7 @@
           <a:p>
             <a:fld id="{3E102D2E-813C-461C-9963-687A650C48C0}" type="datetimeFigureOut">
               <a:rPr lang="en-US" smtClean="0"/>
-              <a:t>4/26/2025</a:t>
+              <a:t>5/16/2025</a:t>
             </a:fld>
             <a:endParaRPr lang="en-US"/>
           </a:p>
@@ -460,7 +461,7 @@
           <a:p>
             <a:fld id="{3E102D2E-813C-461C-9963-687A650C48C0}" type="datetimeFigureOut">
               <a:rPr lang="en-US" smtClean="0"/>
-              <a:t>4/26/2025</a:t>
+              <a:t>5/16/2025</a:t>
             </a:fld>
             <a:endParaRPr lang="en-US"/>
           </a:p>
@@ -668,7 +669,7 @@
           <a:p>
             <a:fld id="{3E102D2E-813C-461C-9963-687A650C48C0}" type="datetimeFigureOut">
               <a:rPr lang="en-US" smtClean="0"/>
-              <a:t>4/26/2025</a:t>
+              <a:t>5/16/2025</a:t>
             </a:fld>
             <a:endParaRPr lang="en-US"/>
           </a:p>
@@ -866,7 +867,7 @@
           <a:p>
             <a:fld id="{3E102D2E-813C-461C-9963-687A650C48C0}" type="datetimeFigureOut">
               <a:rPr lang="en-US" smtClean="0"/>
-              <a:t>4/26/2025</a:t>
+              <a:t>5/16/2025</a:t>
             </a:fld>
             <a:endParaRPr lang="en-US"/>
           </a:p>
@@ -1141,7 +1142,7 @@
           <a:p>
             <a:fld id="{3E102D2E-813C-461C-9963-687A650C48C0}" type="datetimeFigureOut">
               <a:rPr lang="en-US" smtClean="0"/>
-              <a:t>4/26/2025</a:t>
+              <a:t>5/16/2025</a:t>
             </a:fld>
             <a:endParaRPr lang="en-US"/>
           </a:p>
@@ -1406,7 +1407,7 @@
           <a:p>
             <a:fld id="{3E102D2E-813C-461C-9963-687A650C48C0}" type="datetimeFigureOut">
               <a:rPr lang="en-US" smtClean="0"/>
-              <a:t>4/26/2025</a:t>
+              <a:t>5/16/2025</a:t>
             </a:fld>
             <a:endParaRPr lang="en-US"/>
           </a:p>
@@ -1818,7 +1819,7 @@
           <a:p>
             <a:fld id="{3E102D2E-813C-461C-9963-687A650C48C0}" type="datetimeFigureOut">
               <a:rPr lang="en-US" smtClean="0"/>
-              <a:t>4/26/2025</a:t>
+              <a:t>5/16/2025</a:t>
             </a:fld>
             <a:endParaRPr lang="en-US"/>
           </a:p>
@@ -1959,7 +1960,7 @@
           <a:p>
             <a:fld id="{3E102D2E-813C-461C-9963-687A650C48C0}" type="datetimeFigureOut">
               <a:rPr lang="en-US" smtClean="0"/>
-              <a:t>4/26/2025</a:t>
+              <a:t>5/16/2025</a:t>
             </a:fld>
             <a:endParaRPr lang="en-US"/>
           </a:p>
@@ -2072,7 +2073,7 @@
           <a:p>
             <a:fld id="{3E102D2E-813C-461C-9963-687A650C48C0}" type="datetimeFigureOut">
               <a:rPr lang="en-US" smtClean="0"/>
-              <a:t>4/26/2025</a:t>
+              <a:t>5/16/2025</a:t>
             </a:fld>
             <a:endParaRPr lang="en-US"/>
           </a:p>
@@ -2383,7 +2384,7 @@
           <a:p>
             <a:fld id="{3E102D2E-813C-461C-9963-687A650C48C0}" type="datetimeFigureOut">
               <a:rPr lang="en-US" smtClean="0"/>
-              <a:t>4/26/2025</a:t>
+              <a:t>5/16/2025</a:t>
             </a:fld>
             <a:endParaRPr lang="en-US"/>
           </a:p>
@@ -2671,7 +2672,7 @@
           <a:p>
             <a:fld id="{3E102D2E-813C-461C-9963-687A650C48C0}" type="datetimeFigureOut">
               <a:rPr lang="en-US" smtClean="0"/>
-              <a:t>4/26/2025</a:t>
+              <a:t>5/16/2025</a:t>
             </a:fld>
             <a:endParaRPr lang="en-US"/>
           </a:p>
@@ -2912,7 +2913,7 @@
           <a:p>
             <a:fld id="{3E102D2E-813C-461C-9963-687A650C48C0}" type="datetimeFigureOut">
               <a:rPr lang="en-US" smtClean="0"/>
-              <a:t>4/26/2025</a:t>
+              <a:t>5/16/2025</a:t>
             </a:fld>
             <a:endParaRPr lang="en-US"/>
           </a:p>
@@ -3320,6 +3321,312 @@
         <p:cNvPr id="1" name="">
           <a:extLst>
             <a:ext uri="{FF2B5EF4-FFF2-40B4-BE49-F238E27FC236}">
+              <a16:creationId xmlns:a16="http://schemas.microsoft.com/office/drawing/2014/main" id="{129E3554-E255-27E4-0A4C-C9F7633CC3A2}"/>
+            </a:ext>
+          </a:extLst>
+        </p:cNvPr>
+        <p:cNvGrpSpPr/>
+        <p:nvPr/>
+      </p:nvGrpSpPr>
+      <p:grpSpPr>
+        <a:xfrm>
+          <a:off x="0" y="0"/>
+          <a:ext cx="0" cy="0"/>
+          <a:chOff x="0" y="0"/>
+          <a:chExt cx="0" cy="0"/>
+        </a:xfrm>
+      </p:grpSpPr>
+      <p:sp>
+        <p:nvSpPr>
+          <p:cNvPr id="3" name="TextBox 2">
+            <a:extLst>
+              <a:ext uri="{FF2B5EF4-FFF2-40B4-BE49-F238E27FC236}">
+                <a16:creationId xmlns:a16="http://schemas.microsoft.com/office/drawing/2014/main" id="{FB33DF07-F952-CA18-5BD4-2ED8D4CA0EB2}"/>
+              </a:ext>
+            </a:extLst>
+          </p:cNvPr>
+          <p:cNvSpPr txBox="1"/>
+          <p:nvPr/>
+        </p:nvSpPr>
+        <p:spPr>
+          <a:xfrm>
+            <a:off x="217714" y="255046"/>
+            <a:ext cx="11756571" cy="3056093"/>
+          </a:xfrm>
+          <a:prstGeom prst="rect">
+            <a:avLst/>
+          </a:prstGeom>
+          <a:noFill/>
+        </p:spPr>
+        <p:txBody>
+          <a:bodyPr wrap="square">
+            <a:spAutoFit/>
+          </a:bodyPr>
+          <a:lstStyle/>
+          <a:p>
+            <a:pPr>
+              <a:lnSpc>
+                <a:spcPct val="150000"/>
+              </a:lnSpc>
+              <a:buNone/>
+            </a:pPr>
+            <a:r>
+              <a:rPr lang="az-Latn-AZ" altLang="en-US" sz="1300">
+                <a:latin typeface="Arial" panose="020B0604020202020204" pitchFamily="34" charset="0"/>
+              </a:rPr>
+              <a:t>İndi </a:t>
+            </a:r>
+            <a:r>
+              <a:rPr lang="az-Latn-AZ" altLang="en-US" sz="1300" b="1">
+                <a:latin typeface="Arial" panose="020B0604020202020204" pitchFamily="34" charset="0"/>
+              </a:rPr>
+              <a:t>Post</a:t>
+            </a:r>
+            <a:r>
+              <a:rPr lang="az-Latn-AZ" altLang="en-US" sz="1300">
+                <a:latin typeface="Arial" panose="020B0604020202020204" pitchFamily="34" charset="0"/>
+              </a:rPr>
+              <a:t> modelini </a:t>
+            </a:r>
+            <a:r>
+              <a:rPr lang="az-Latn-AZ" altLang="en-US" sz="1300" b="1">
+                <a:latin typeface="Arial" panose="020B0604020202020204" pitchFamily="34" charset="0"/>
+              </a:rPr>
+              <a:t>migration</a:t>
+            </a:r>
+            <a:r>
+              <a:rPr lang="az-Latn-AZ" altLang="en-US" sz="1300">
+                <a:latin typeface="Arial" panose="020B0604020202020204" pitchFamily="34" charset="0"/>
+              </a:rPr>
+              <a:t> ilə birlikdə yaradırıq. </a:t>
+            </a:r>
+          </a:p>
+          <a:p>
+            <a:pPr>
+              <a:lnSpc>
+                <a:spcPct val="150000"/>
+              </a:lnSpc>
+              <a:buNone/>
+            </a:pPr>
+            <a:endParaRPr kumimoji="0" lang="az-Latn-AZ" altLang="en-US" sz="1300" b="0" i="0" u="none" strike="noStrike" cap="none" normalizeH="0" baseline="0">
+              <a:ln>
+                <a:noFill/>
+              </a:ln>
+              <a:solidFill>
+                <a:schemeClr val="tx1"/>
+              </a:solidFill>
+              <a:effectLst/>
+              <a:latin typeface="Arial" panose="020B0604020202020204" pitchFamily="34" charset="0"/>
+            </a:endParaRPr>
+          </a:p>
+          <a:p>
+            <a:pPr>
+              <a:lnSpc>
+                <a:spcPct val="150000"/>
+              </a:lnSpc>
+              <a:buNone/>
+            </a:pPr>
+            <a:endParaRPr lang="az-Latn-AZ" altLang="en-US" sz="1300">
+              <a:latin typeface="Arial" panose="020B0604020202020204" pitchFamily="34" charset="0"/>
+            </a:endParaRPr>
+          </a:p>
+          <a:p>
+            <a:pPr>
+              <a:lnSpc>
+                <a:spcPct val="150000"/>
+              </a:lnSpc>
+              <a:buNone/>
+            </a:pPr>
+            <a:endParaRPr kumimoji="0" lang="az-Latn-AZ" altLang="en-US" sz="1300" b="0" i="0" u="none" strike="noStrike" cap="none" normalizeH="0" baseline="0">
+              <a:ln>
+                <a:noFill/>
+              </a:ln>
+              <a:solidFill>
+                <a:schemeClr val="tx1"/>
+              </a:solidFill>
+              <a:effectLst/>
+              <a:latin typeface="Arial" panose="020B0604020202020204" pitchFamily="34" charset="0"/>
+            </a:endParaRPr>
+          </a:p>
+          <a:p>
+            <a:pPr>
+              <a:lnSpc>
+                <a:spcPct val="150000"/>
+              </a:lnSpc>
+              <a:buNone/>
+            </a:pPr>
+            <a:r>
+              <a:rPr lang="en-US" altLang="en-US" sz="1300">
+                <a:latin typeface="Arial" panose="020B0604020202020204" pitchFamily="34" charset="0"/>
+              </a:rPr>
+              <a:t>C</a:t>
+            </a:r>
+            <a:r>
+              <a:rPr lang="az-Latn-AZ" altLang="en-US" sz="1300">
+                <a:latin typeface="Arial" panose="020B0604020202020204" pitchFamily="34" charset="0"/>
+              </a:rPr>
+              <a:t>ədvəli doldururuq.</a:t>
+            </a:r>
+          </a:p>
+          <a:p>
+            <a:pPr>
+              <a:lnSpc>
+                <a:spcPct val="150000"/>
+              </a:lnSpc>
+              <a:buNone/>
+            </a:pPr>
+            <a:endParaRPr kumimoji="0" lang="az-Latn-AZ" altLang="en-US" sz="1300" b="0" i="0" u="none" strike="noStrike" cap="none" normalizeH="0" baseline="0">
+              <a:ln>
+                <a:noFill/>
+              </a:ln>
+              <a:solidFill>
+                <a:schemeClr val="tx1"/>
+              </a:solidFill>
+              <a:effectLst/>
+              <a:latin typeface="Arial" panose="020B0604020202020204" pitchFamily="34" charset="0"/>
+            </a:endParaRPr>
+          </a:p>
+          <a:p>
+            <a:pPr>
+              <a:lnSpc>
+                <a:spcPct val="150000"/>
+              </a:lnSpc>
+              <a:buNone/>
+            </a:pPr>
+            <a:endParaRPr lang="az-Latn-AZ" altLang="en-US" sz="1300">
+              <a:latin typeface="Arial" panose="020B0604020202020204" pitchFamily="34" charset="0"/>
+            </a:endParaRPr>
+          </a:p>
+          <a:p>
+            <a:pPr>
+              <a:lnSpc>
+                <a:spcPct val="150000"/>
+              </a:lnSpc>
+              <a:buNone/>
+            </a:pPr>
+            <a:endParaRPr kumimoji="0" lang="az-Latn-AZ" altLang="en-US" sz="1300" b="0" i="0" u="none" strike="noStrike" cap="none" normalizeH="0" baseline="0">
+              <a:ln>
+                <a:noFill/>
+              </a:ln>
+              <a:solidFill>
+                <a:schemeClr val="tx1"/>
+              </a:solidFill>
+              <a:effectLst/>
+              <a:latin typeface="Arial" panose="020B0604020202020204" pitchFamily="34" charset="0"/>
+            </a:endParaRPr>
+          </a:p>
+          <a:p>
+            <a:pPr>
+              <a:lnSpc>
+                <a:spcPct val="150000"/>
+              </a:lnSpc>
+              <a:buNone/>
+            </a:pPr>
+            <a:endParaRPr lang="az-Latn-AZ" altLang="en-US" sz="1300">
+              <a:latin typeface="Arial" panose="020B0604020202020204" pitchFamily="34" charset="0"/>
+            </a:endParaRPr>
+          </a:p>
+          <a:p>
+            <a:pPr>
+              <a:lnSpc>
+                <a:spcPct val="150000"/>
+              </a:lnSpc>
+              <a:buNone/>
+            </a:pPr>
+            <a:endParaRPr kumimoji="0" lang="en-US" altLang="en-US" sz="1300" b="0" i="0" u="none" strike="noStrike" cap="none" normalizeH="0" baseline="0">
+              <a:ln>
+                <a:noFill/>
+              </a:ln>
+              <a:solidFill>
+                <a:schemeClr val="tx1"/>
+              </a:solidFill>
+              <a:effectLst/>
+              <a:latin typeface="Arial" panose="020B0604020202020204" pitchFamily="34" charset="0"/>
+            </a:endParaRPr>
+          </a:p>
+        </p:txBody>
+      </p:sp>
+      <p:pic>
+        <p:nvPicPr>
+          <p:cNvPr id="4" name="Picture 3">
+            <a:extLst>
+              <a:ext uri="{FF2B5EF4-FFF2-40B4-BE49-F238E27FC236}">
+                <a16:creationId xmlns:a16="http://schemas.microsoft.com/office/drawing/2014/main" id="{658AC391-449A-35A3-A028-840A6AF9C740}"/>
+              </a:ext>
+            </a:extLst>
+          </p:cNvPr>
+          <p:cNvPicPr>
+            <a:picLocks noChangeAspect="1"/>
+          </p:cNvPicPr>
+          <p:nvPr/>
+        </p:nvPicPr>
+        <p:blipFill>
+          <a:blip r:embed="rId2"/>
+          <a:stretch>
+            <a:fillRect/>
+          </a:stretch>
+        </p:blipFill>
+        <p:spPr>
+          <a:xfrm>
+            <a:off x="6095999" y="0"/>
+            <a:ext cx="6098245" cy="1317711"/>
+          </a:xfrm>
+          <a:prstGeom prst="rect">
+            <a:avLst/>
+          </a:prstGeom>
+        </p:spPr>
+      </p:pic>
+      <p:pic>
+        <p:nvPicPr>
+          <p:cNvPr id="10" name="Picture 9">
+            <a:extLst>
+              <a:ext uri="{FF2B5EF4-FFF2-40B4-BE49-F238E27FC236}">
+                <a16:creationId xmlns:a16="http://schemas.microsoft.com/office/drawing/2014/main" id="{3D4F84E7-A317-895C-C6F7-38F86FCF1B41}"/>
+              </a:ext>
+            </a:extLst>
+          </p:cNvPr>
+          <p:cNvPicPr>
+            <a:picLocks noChangeAspect="1"/>
+          </p:cNvPicPr>
+          <p:nvPr/>
+        </p:nvPicPr>
+        <p:blipFill>
+          <a:blip r:embed="rId3"/>
+          <a:stretch>
+            <a:fillRect/>
+          </a:stretch>
+        </p:blipFill>
+        <p:spPr>
+          <a:xfrm>
+            <a:off x="7785144" y="1465610"/>
+            <a:ext cx="4406856" cy="5392390"/>
+          </a:xfrm>
+          <a:prstGeom prst="rect">
+            <a:avLst/>
+          </a:prstGeom>
+        </p:spPr>
+      </p:pic>
+    </p:spTree>
+    <p:extLst>
+      <p:ext uri="{BB962C8B-B14F-4D97-AF65-F5344CB8AC3E}">
+        <p14:creationId xmlns:p14="http://schemas.microsoft.com/office/powerpoint/2010/main" val="2534739390"/>
+      </p:ext>
+    </p:extLst>
+  </p:cSld>
+  <p:clrMapOvr>
+    <a:masterClrMapping/>
+  </p:clrMapOvr>
+</p:sld>
+</file>
+
+<file path=ppt/slides/slide2.xml><?xml version="1.0" encoding="utf-8"?>
+<p:sld xmlns:a="http://schemas.openxmlformats.org/drawingml/2006/main" xmlns:r="http://schemas.openxmlformats.org/officeDocument/2006/relationships" xmlns:p="http://schemas.openxmlformats.org/presentationml/2006/main">
+  <p:cSld>
+    <p:spTree>
+      <p:nvGrpSpPr>
+        <p:cNvPr id="1" name="">
+          <a:extLst>
+            <a:ext uri="{FF2B5EF4-FFF2-40B4-BE49-F238E27FC236}">
               <a16:creationId xmlns:a16="http://schemas.microsoft.com/office/drawing/2014/main" id="{79563835-1EEE-8069-B190-F3BCAF2CFF3C}"/>
             </a:ext>
           </a:extLst>
@@ -3350,7 +3657,7 @@
         <p:spPr>
           <a:xfrm>
             <a:off x="217714" y="255046"/>
-            <a:ext cx="11756571" cy="355354"/>
+            <a:ext cx="11756571" cy="1855764"/>
           </a:xfrm>
           <a:prstGeom prst="rect">
             <a:avLst/>
@@ -3370,7 +3677,110 @@
               <a:buNone/>
             </a:pPr>
             <a:r>
-              <a:rPr kumimoji="0" lang="en-US" altLang="en-US" sz="1300" b="0" i="0" u="none" strike="noStrike" cap="none" normalizeH="0" baseline="0">
+              <a:rPr lang="az-Latn-AZ" altLang="en-US" sz="1300">
+                <a:latin typeface="Arial" panose="020B0604020202020204" pitchFamily="34" charset="0"/>
+              </a:rPr>
+              <a:t>Və </a:t>
+            </a:r>
+            <a:r>
+              <a:rPr lang="az-Latn-AZ" altLang="en-US" sz="1300" b="1">
+                <a:latin typeface="Arial" panose="020B0604020202020204" pitchFamily="34" charset="0"/>
+              </a:rPr>
+              <a:t>Category</a:t>
+            </a:r>
+            <a:r>
+              <a:rPr lang="az-Latn-AZ" altLang="en-US" sz="1300">
+                <a:latin typeface="Arial" panose="020B0604020202020204" pitchFamily="34" charset="0"/>
+              </a:rPr>
+              <a:t> modelini </a:t>
+            </a:r>
+            <a:r>
+              <a:rPr lang="az-Latn-AZ" altLang="en-US" sz="1300" b="1">
+                <a:latin typeface="Arial" panose="020B0604020202020204" pitchFamily="34" charset="0"/>
+              </a:rPr>
+              <a:t>migration</a:t>
+            </a:r>
+            <a:r>
+              <a:rPr lang="az-Latn-AZ" altLang="en-US" sz="1300">
+                <a:latin typeface="Arial" panose="020B0604020202020204" pitchFamily="34" charset="0"/>
+              </a:rPr>
+              <a:t> ilə birlikdə yaradırıq. </a:t>
+            </a:r>
+          </a:p>
+          <a:p>
+            <a:pPr>
+              <a:lnSpc>
+                <a:spcPct val="150000"/>
+              </a:lnSpc>
+              <a:buNone/>
+            </a:pPr>
+            <a:endParaRPr kumimoji="0" lang="az-Latn-AZ" altLang="en-US" sz="1300" b="0" i="0" u="none" strike="noStrike" cap="none" normalizeH="0" baseline="0">
+              <a:ln>
+                <a:noFill/>
+              </a:ln>
+              <a:solidFill>
+                <a:schemeClr val="tx1"/>
+              </a:solidFill>
+              <a:effectLst/>
+              <a:latin typeface="Arial" panose="020B0604020202020204" pitchFamily="34" charset="0"/>
+            </a:endParaRPr>
+          </a:p>
+          <a:p>
+            <a:pPr>
+              <a:lnSpc>
+                <a:spcPct val="150000"/>
+              </a:lnSpc>
+              <a:buNone/>
+            </a:pPr>
+            <a:endParaRPr kumimoji="0" lang="en-US" altLang="en-US" sz="1300" b="0" i="0" u="none" strike="noStrike" cap="none" normalizeH="0" baseline="0">
+              <a:ln>
+                <a:noFill/>
+              </a:ln>
+              <a:solidFill>
+                <a:schemeClr val="tx1"/>
+              </a:solidFill>
+              <a:effectLst/>
+              <a:latin typeface="Arial" panose="020B0604020202020204" pitchFamily="34" charset="0"/>
+            </a:endParaRPr>
+          </a:p>
+          <a:p>
+            <a:pPr>
+              <a:lnSpc>
+                <a:spcPct val="150000"/>
+              </a:lnSpc>
+              <a:buNone/>
+            </a:pPr>
+            <a:endParaRPr kumimoji="0" lang="az-Latn-AZ" altLang="en-US" sz="1300" b="0" i="0" u="none" strike="noStrike" cap="none" normalizeH="0" baseline="0">
+              <a:ln>
+                <a:noFill/>
+              </a:ln>
+              <a:solidFill>
+                <a:schemeClr val="tx1"/>
+              </a:solidFill>
+              <a:effectLst/>
+              <a:latin typeface="Arial" panose="020B0604020202020204" pitchFamily="34" charset="0"/>
+            </a:endParaRPr>
+          </a:p>
+          <a:p>
+            <a:pPr>
+              <a:lnSpc>
+                <a:spcPct val="150000"/>
+              </a:lnSpc>
+              <a:buNone/>
+            </a:pPr>
+            <a:endParaRPr lang="az-Latn-AZ" altLang="en-US" sz="1300">
+              <a:latin typeface="Arial" panose="020B0604020202020204" pitchFamily="34" charset="0"/>
+            </a:endParaRPr>
+          </a:p>
+          <a:p>
+            <a:pPr>
+              <a:lnSpc>
+                <a:spcPct val="150000"/>
+              </a:lnSpc>
+              <a:buNone/>
+            </a:pPr>
+            <a:r>
+              <a:rPr kumimoji="0" lang="az-Latn-AZ" altLang="en-US" sz="1300" b="0" i="0" u="none" strike="noStrike" cap="none" normalizeH="0" baseline="0">
                 <a:ln>
                   <a:noFill/>
                 </a:ln>
@@ -3380,11 +3790,87 @@
                 <a:effectLst/>
                 <a:latin typeface="Arial" panose="020B0604020202020204" pitchFamily="34" charset="0"/>
               </a:rPr>
-              <a:t>.</a:t>
-            </a:r>
-          </a:p>
-        </p:txBody>
-      </p:sp>
+              <a:t>Cədvəli </a:t>
+            </a:r>
+            <a:r>
+              <a:rPr lang="az-Latn-AZ" altLang="en-US" sz="1300">
+                <a:latin typeface="Arial" panose="020B0604020202020204" pitchFamily="34" charset="0"/>
+              </a:rPr>
+              <a:t>doldururuq.</a:t>
+            </a:r>
+            <a:endParaRPr kumimoji="0" lang="en-US" altLang="en-US" sz="1300" b="0" i="0" u="none" strike="noStrike" cap="none" normalizeH="0" baseline="0">
+              <a:ln>
+                <a:noFill/>
+              </a:ln>
+              <a:solidFill>
+                <a:schemeClr val="tx1"/>
+              </a:solidFill>
+              <a:effectLst/>
+              <a:latin typeface="Arial" panose="020B0604020202020204" pitchFamily="34" charset="0"/>
+            </a:endParaRPr>
+          </a:p>
+        </p:txBody>
+      </p:sp>
+      <p:pic>
+        <p:nvPicPr>
+          <p:cNvPr id="6" name="Picture 5">
+            <a:extLst>
+              <a:ext uri="{FF2B5EF4-FFF2-40B4-BE49-F238E27FC236}">
+                <a16:creationId xmlns:a16="http://schemas.microsoft.com/office/drawing/2014/main" id="{B8E40021-9B10-0B51-C56A-B6FCB74DE731}"/>
+              </a:ext>
+            </a:extLst>
+          </p:cNvPr>
+          <p:cNvPicPr>
+            <a:picLocks noChangeAspect="1"/>
+          </p:cNvPicPr>
+          <p:nvPr/>
+        </p:nvPicPr>
+        <p:blipFill>
+          <a:blip r:embed="rId2"/>
+          <a:stretch>
+            <a:fillRect/>
+          </a:stretch>
+        </p:blipFill>
+        <p:spPr>
+          <a:xfrm>
+            <a:off x="4543720" y="0"/>
+            <a:ext cx="7648280" cy="1054423"/>
+          </a:xfrm>
+          <a:prstGeom prst="rect">
+            <a:avLst/>
+          </a:prstGeom>
+        </p:spPr>
+      </p:pic>
+      <p:pic>
+        <p:nvPicPr>
+          <p:cNvPr id="12" name="Picture 11">
+            <a:extLst>
+              <a:ext uri="{FF2B5EF4-FFF2-40B4-BE49-F238E27FC236}">
+                <a16:creationId xmlns:a16="http://schemas.microsoft.com/office/drawing/2014/main" id="{276B3A3C-2674-FF1B-FFCE-947104967833}"/>
+              </a:ext>
+            </a:extLst>
+          </p:cNvPr>
+          <p:cNvPicPr>
+            <a:picLocks noChangeAspect="1"/>
+          </p:cNvPicPr>
+          <p:nvPr/>
+        </p:nvPicPr>
+        <p:blipFill>
+          <a:blip r:embed="rId3"/>
+          <a:stretch>
+            <a:fillRect/>
+          </a:stretch>
+        </p:blipFill>
+        <p:spPr>
+          <a:xfrm>
+            <a:off x="7032396" y="1570893"/>
+            <a:ext cx="5159604" cy="5287107"/>
+          </a:xfrm>
+          <a:prstGeom prst="rect">
+            <a:avLst/>
+          </a:prstGeom>
+        </p:spPr>
+      </p:pic>
     </p:spTree>
     <p:extLst>
       <p:ext uri="{BB962C8B-B14F-4D97-AF65-F5344CB8AC3E}">
@@ -3398,7 +3884,7 @@
 </p:sld>
 </file>
 
-<file path=ppt/slides/slide2.xml><?xml version="1.0" encoding="utf-8"?>
+<file path=ppt/slides/slide3.xml><?xml version="1.0" encoding="utf-8"?>
 <p:sld xmlns:a="http://schemas.openxmlformats.org/drawingml/2006/main" xmlns:r="http://schemas.openxmlformats.org/officeDocument/2006/relationships" xmlns:p="http://schemas.openxmlformats.org/presentationml/2006/main">
   <p:cSld>
     <p:spTree>
@@ -3456,21 +3942,69 @@
               <a:buNone/>
             </a:pPr>
             <a:r>
-              <a:rPr kumimoji="0" lang="en-US" altLang="en-US" sz="1300" b="0" i="0" u="none" strike="noStrike" cap="none" normalizeH="0" baseline="0">
-                <a:ln>
-                  <a:noFill/>
-                </a:ln>
-                <a:solidFill>
-                  <a:schemeClr val="tx1"/>
-                </a:solidFill>
-                <a:effectLst/>
+              <a:rPr lang="az-Latn-AZ" altLang="en-US" sz="1300">
                 <a:latin typeface="Arial" panose="020B0604020202020204" pitchFamily="34" charset="0"/>
               </a:rPr>
-              <a:t>.</a:t>
-            </a:r>
-          </a:p>
-        </p:txBody>
-      </p:sp>
+              <a:t>Cədvəlləri </a:t>
+            </a:r>
+            <a:r>
+              <a:rPr lang="az-Latn-AZ" altLang="en-US" sz="1300" b="1">
+                <a:solidFill>
+                  <a:srgbClr val="FF0000"/>
+                </a:solidFill>
+                <a:latin typeface="Arial" panose="020B0604020202020204" pitchFamily="34" charset="0"/>
+              </a:rPr>
+              <a:t>migrate</a:t>
+            </a:r>
+            <a:r>
+              <a:rPr lang="az-Latn-AZ" altLang="en-US" sz="1300">
+                <a:latin typeface="Arial" panose="020B0604020202020204" pitchFamily="34" charset="0"/>
+              </a:rPr>
+              <a:t> edirik.</a:t>
+            </a:r>
+            <a:endParaRPr kumimoji="0" lang="en-US" altLang="en-US" sz="1300" b="0" i="0" u="none" strike="noStrike" cap="none" normalizeH="0" baseline="0">
+              <a:ln>
+                <a:noFill/>
+              </a:ln>
+              <a:solidFill>
+                <a:schemeClr val="tx1"/>
+              </a:solidFill>
+              <a:effectLst/>
+              <a:latin typeface="Arial" panose="020B0604020202020204" pitchFamily="34" charset="0"/>
+            </a:endParaRPr>
+          </a:p>
+        </p:txBody>
+      </p:sp>
+      <p:pic>
+        <p:nvPicPr>
+          <p:cNvPr id="4" name="Picture 3">
+            <a:extLst>
+              <a:ext uri="{FF2B5EF4-FFF2-40B4-BE49-F238E27FC236}">
+                <a16:creationId xmlns:a16="http://schemas.microsoft.com/office/drawing/2014/main" id="{43B5E837-6C7E-BBA7-755C-58F8145A6362}"/>
+              </a:ext>
+            </a:extLst>
+          </p:cNvPr>
+          <p:cNvPicPr>
+            <a:picLocks noChangeAspect="1"/>
+          </p:cNvPicPr>
+          <p:nvPr/>
+        </p:nvPicPr>
+        <p:blipFill>
+          <a:blip r:embed="rId2"/>
+          <a:stretch>
+            <a:fillRect/>
+          </a:stretch>
+        </p:blipFill>
+        <p:spPr>
+          <a:xfrm>
+            <a:off x="398404" y="4762208"/>
+            <a:ext cx="11793596" cy="2095792"/>
+          </a:xfrm>
+          <a:prstGeom prst="rect">
+            <a:avLst/>
+          </a:prstGeom>
+        </p:spPr>
+      </p:pic>
     </p:spTree>
     <p:extLst>
       <p:ext uri="{BB962C8B-B14F-4D97-AF65-F5344CB8AC3E}">
@@ -3484,7 +4018,7 @@
 </p:sld>
 </file>
 
-<file path=ppt/slides/slide3.xml><?xml version="1.0" encoding="utf-8"?>
+<file path=ppt/slides/slide4.xml><?xml version="1.0" encoding="utf-8"?>
 <p:sld xmlns:a="http://schemas.openxmlformats.org/drawingml/2006/main" xmlns:r="http://schemas.openxmlformats.org/officeDocument/2006/relationships" xmlns:p="http://schemas.openxmlformats.org/presentationml/2006/main">
   <p:cSld>
     <p:spTree>
@@ -3570,7 +4104,7 @@
 </p:sld>
 </file>
 
-<file path=ppt/slides/slide4.xml><?xml version="1.0" encoding="utf-8"?>
+<file path=ppt/slides/slide5.xml><?xml version="1.0" encoding="utf-8"?>
 <p:sld xmlns:a="http://schemas.openxmlformats.org/drawingml/2006/main" xmlns:r="http://schemas.openxmlformats.org/officeDocument/2006/relationships" xmlns:p="http://schemas.openxmlformats.org/presentationml/2006/main">
   <p:cSld>
     <p:spTree>
